--- a/dist/weeks-1학기/서비스디자인_1학기_11주차_화면디자인.pptx
+++ b/dist/weeks-1학기/서비스디자인_1학기_11주차_화면디자인.pptx
@@ -8563,7 +8563,7 @@
               <a:buNone/>
             </a:pPr>
             <a:r>
-              <a:rPr lang="en-US" sz="1150" dirty="0">
+              <a:rPr lang="en-US" sz="1050" dirty="0">
                 <a:solidFill>
                   <a:srgbClr val="6E6E6E"/>
                 </a:solidFill>
@@ -8573,7 +8573,7 @@
               </a:rPr>
               <a:t>가장 강하고 가장 먼저 쓰는 수단입니다. 타이포 스케일에서 두 단계 이상 차이가 나야 위계로 읽힙니다. 한 단계 차이는 실수처럼 보입니다.</a:t>
             </a:r>
-            <a:endParaRPr lang="en-US" sz="1150" dirty="0"/>
+            <a:endParaRPr lang="en-US" sz="1050" dirty="0"/>
           </a:p>
         </p:txBody>
       </p:sp>
@@ -8736,7 +8736,7 @@
               <a:buNone/>
             </a:pPr>
             <a:r>
-              <a:rPr lang="en-US" sz="1150" dirty="0">
+              <a:rPr lang="en-US" sz="1050" dirty="0">
                 <a:solidFill>
                   <a:srgbClr val="6E6E6E"/>
                 </a:solidFill>
@@ -8746,7 +8746,7 @@
               </a:rPr>
               <a:t>같은 크기여도 진한 것이 먼저 보입니다. 보조 정보를 연하게 만드는 것이 강조를 키우는 것보다 안전합니다.</a:t>
             </a:r>
-            <a:endParaRPr lang="en-US" sz="1150" dirty="0"/>
+            <a:endParaRPr lang="en-US" sz="1050" dirty="0"/>
           </a:p>
         </p:txBody>
       </p:sp>
@@ -8909,7 +8909,7 @@
               <a:buNone/>
             </a:pPr>
             <a:r>
-              <a:rPr lang="en-US" sz="1150" dirty="0">
+              <a:rPr lang="en-US" sz="1050" dirty="0">
                 <a:solidFill>
                   <a:srgbClr val="6E6E6E"/>
                 </a:solidFill>
@@ -8919,7 +8919,7 @@
               </a:rPr>
               <a:t>주위를 비우면 저절로 커 보입니다. 가장 세련된 강조 방법이고, 패널에서 특히 강하게 작동합니다.</a:t>
             </a:r>
-            <a:endParaRPr lang="en-US" sz="1150" dirty="0"/>
+            <a:endParaRPr lang="en-US" sz="1050" dirty="0"/>
           </a:p>
         </p:txBody>
       </p:sp>
@@ -9082,7 +9082,7 @@
               <a:buNone/>
             </a:pPr>
             <a:r>
-              <a:rPr lang="en-US" sz="1150" dirty="0">
+              <a:rPr lang="en-US" sz="1050" dirty="0">
                 <a:solidFill>
                   <a:srgbClr val="B8B8B8"/>
                 </a:solidFill>
@@ -9092,7 +9092,7 @@
               </a:rPr>
               <a:t>강조색 하나만. 화면당 강조색 요소는 한두 개입니다. 세 개가 넘으면 아무것도 강조되지 않습니다.</a:t>
             </a:r>
-            <a:endParaRPr lang="en-US" sz="1150" dirty="0"/>
+            <a:endParaRPr lang="en-US" sz="1050" dirty="0"/>
           </a:p>
         </p:txBody>
       </p:sp>
